--- a/nisan-cedes-pano.pptx
+++ b/nisan-cedes-pano.pptx
@@ -1163,6 +1163,10 @@
           </a:solidFill>
           <a:ln/>
         </p:spPr>
+        <p:txBody>
+          <a:bodyPr/>
+          <a:p/>
+        </p:txBody>
       </p:sp>
       <p:sp>
         <p:nvSpPr>
@@ -1185,6 +1189,10 @@
           </a:solidFill>
           <a:ln/>
         </p:spPr>
+        <p:txBody>
+          <a:bodyPr/>
+          <a:p/>
+        </p:txBody>
       </p:sp>
       <p:sp>
         <p:nvSpPr>
@@ -1258,7 +1266,7 @@
                 <a:ea typeface="Calibri" pitchFamily="34" charset="-122"/>
                 <a:cs typeface="Calibri" pitchFamily="34" charset="-120"/>
               </a:rPr>
-              <a:t>NISAN AYI  •  TASARRUF • DUYARLILIK</a:t>
+              <a:t>NİSAN AYI  •  SORUMLULUK • MERHAMET</a:t>
             </a:r>
             <a:endParaRPr lang="en-US" sz="2000" dirty="0"/>
           </a:p>
@@ -1294,7 +1302,7 @@
                   <a:srgbClr val="FFFFFF"/>
                 </a:solidFill>
               </a:rPr>
-              <a:t>2025 - 2026 Eğitim Öğretim Yılı</a:t>
+              <a:t>2026 - 2027 Eğitim Öğretim Yılı</a:t>
             </a:r>
             <a:endParaRPr lang="en-US" sz="1600" dirty="0"/>
           </a:p>
@@ -1347,10 +1355,14 @@
             <a:avLst/>
           </a:prstGeom>
           <a:solidFill>
-            <a:srgbClr val="B85042"/>
+            <a:srgbClr val="6D2E46"/>
           </a:solidFill>
           <a:ln/>
         </p:spPr>
+        <p:txBody>
+          <a:bodyPr/>
+          <a:p/>
+        </p:txBody>
       </p:sp>
       <p:sp>
         <p:nvSpPr>
@@ -1382,7 +1394,7 @@
                   <a:srgbClr val="000000"/>
                 </a:solidFill>
               </a:rPr>
-              <a:t>💧</a:t>
+              <a:t>🌿</a:t>
             </a:r>
             <a:endParaRPr lang="en-US" sz="8000" dirty="0"/>
           </a:p>
@@ -1421,7 +1433,7 @@
                 <a:ea typeface="Cambria" pitchFamily="34" charset="-122"/>
                 <a:cs typeface="Cambria" pitchFamily="34" charset="-120"/>
               </a:rPr>
-              <a:t>TASARRUF</a:t>
+              <a:t>SORUMLULUK</a:t>
             </a:r>
             <a:endParaRPr lang="en-US" sz="2600" dirty="0"/>
           </a:p>
@@ -1457,7 +1469,7 @@
                   <a:srgbClr val="FFFFFF"/>
                 </a:solidFill>
               </a:rPr>
-              <a:t>Kaynakları Bilinçli Kullanmak</a:t>
+              <a:t>Üzerimize Düşeni Yapmak</a:t>
             </a:r>
             <a:endParaRPr lang="en-US" sz="1500" dirty="0"/>
           </a:p>
@@ -1486,6 +1498,10 @@
           </a:solidFill>
           <a:ln/>
         </p:spPr>
+        <p:txBody>
+          <a:bodyPr/>
+          <a:p/>
+        </p:txBody>
       </p:sp>
       <p:sp>
         <p:nvSpPr>
@@ -1517,7 +1533,7 @@
                   <a:srgbClr val="2B2B2B"/>
                 </a:solidFill>
               </a:rPr>
-              <a:t>1. HAFTA</a:t>
+              <a:t>24 ve 25. HAFTA</a:t>
             </a:r>
             <a:endParaRPr lang="en-US" sz="1600" dirty="0"/>
           </a:p>
@@ -1531,7 +1547,7 @@
                   <a:srgbClr val="2B2B2B"/>
                 </a:solidFill>
               </a:rPr>
-              <a:t>06 - 10 Nisan</a:t>
+              <a:t>5 – 16 Nisan</a:t>
             </a:r>
             <a:endParaRPr lang="en-US" sz="1600" dirty="0"/>
           </a:p>
@@ -1564,13 +1580,13 @@
             <a:r>
               <a:rPr lang="en-US" sz="2200" b="1" i="1" dirty="0">
                 <a:solidFill>
-                  <a:srgbClr val="1F4E79"/>
+                  <a:srgbClr val="36454F"/>
                 </a:solidFill>
                 <a:latin typeface="Cambria" pitchFamily="34" charset="0"/>
                 <a:ea typeface="Cambria" pitchFamily="34" charset="-122"/>
                 <a:cs typeface="Cambria" pitchFamily="34" charset="-120"/>
               </a:rPr>
-              <a:t>"Tasarruf, kaynaklarımıza gösterdiğimiz saygıdır."</a:t>
+              <a:t>"Küçük bir görev, büyük bir güven demektir."</a:t>
             </a:r>
             <a:endParaRPr lang="en-US" sz="2200" dirty="0"/>
           </a:p>
@@ -1610,7 +1626,7 @@
                   <a:srgbClr val="2B2B2B"/>
                 </a:solidFill>
               </a:rPr>
-              <a:t>Suyu ve elektriği gereksiz yere kullanmayız.</a:t>
+              <a:t>Üzerimize düşeni zamanında yaparız.</a:t>
             </a:r>
             <a:endParaRPr lang="en-US" sz="1700" dirty="0"/>
           </a:p>
@@ -1628,7 +1644,7 @@
                   <a:srgbClr val="2B2B2B"/>
                 </a:solidFill>
               </a:rPr>
-              <a:t>Eşyalarımıza özen gösterip uzun ömürlü kullanırız.</a:t>
+              <a:t>Unuttuğumuzda telafi etmeye çalışırız.</a:t>
             </a:r>
             <a:endParaRPr lang="en-US" sz="1700" dirty="0"/>
           </a:p>
@@ -1646,7 +1662,7 @@
                   <a:srgbClr val="2B2B2B"/>
                 </a:solidFill>
               </a:rPr>
-              <a:t>Kağıdı israf etmeden kullanırız.</a:t>
+              <a:t>Sorumluluk almak güven kazandırır.</a:t>
             </a:r>
             <a:endParaRPr lang="en-US" sz="1700" dirty="0"/>
           </a:p>
@@ -1664,7 +1680,7 @@
                   <a:srgbClr val="2B2B2B"/>
                 </a:solidFill>
               </a:rPr>
-              <a:t>Küçük tasarruflar büyük fark yaratır.</a:t>
+              <a:t>Ortak eşyalara özen göstermek de sorumluluktur.</a:t>
             </a:r>
             <a:endParaRPr lang="en-US" sz="1700" dirty="0"/>
           </a:p>
@@ -1680,7 +1696,7 @@
 
 <file path=ppt/slides/slide3.xml><?xml version="1.0" encoding="utf-8"?>
 <p:sld xmlns:a="http://schemas.openxmlformats.org/drawingml/2006/main" xmlns:r="http://schemas.openxmlformats.org/officeDocument/2006/relationships" xmlns:p="http://schemas.openxmlformats.org/presentationml/2006/main">
-  <p:cSld name="Slide 3">
+  <p:cSld name="Slide 4">
     <p:bg>
       <p:bgPr>
         <a:solidFill>
@@ -1717,10 +1733,14 @@
             <a:avLst/>
           </a:prstGeom>
           <a:solidFill>
-            <a:srgbClr val="B85042"/>
+            <a:srgbClr val="990011"/>
           </a:solidFill>
           <a:ln/>
         </p:spPr>
+        <p:txBody>
+          <a:bodyPr/>
+          <a:p/>
+        </p:txBody>
       </p:sp>
       <p:sp>
         <p:nvSpPr>
@@ -1752,7 +1772,7 @@
                   <a:srgbClr val="000000"/>
                 </a:solidFill>
               </a:rPr>
-              <a:t>🌍</a:t>
+              <a:t>🐾</a:t>
             </a:r>
             <a:endParaRPr lang="en-US" sz="8000" dirty="0"/>
           </a:p>
@@ -1791,7 +1811,7 @@
                 <a:ea typeface="Cambria" pitchFamily="34" charset="-122"/>
                 <a:cs typeface="Cambria" pitchFamily="34" charset="-120"/>
               </a:rPr>
-              <a:t>DUYARLILIK</a:t>
+              <a:t>MERHAMET</a:t>
             </a:r>
             <a:endParaRPr lang="en-US" sz="2600" dirty="0"/>
           </a:p>
@@ -1827,7 +1847,7 @@
                   <a:srgbClr val="FFFFFF"/>
                 </a:solidFill>
               </a:rPr>
-              <a:t>Çevreye ve İnsanlara Duyarlı Olmak</a:t>
+              <a:t>Şefkat ve Yardımseverlik</a:t>
             </a:r>
             <a:endParaRPr lang="en-US" sz="1500" dirty="0"/>
           </a:p>
@@ -1856,6 +1876,10 @@
           </a:solidFill>
           <a:ln/>
         </p:spPr>
+        <p:txBody>
+          <a:bodyPr/>
+          <a:p/>
+        </p:txBody>
       </p:sp>
       <p:sp>
         <p:nvSpPr>
@@ -1887,7 +1911,7 @@
                   <a:srgbClr val="2B2B2B"/>
                 </a:solidFill>
               </a:rPr>
-              <a:t>2. HAFTA</a:t>
+              <a:t>26 ve 27. HAFTA</a:t>
             </a:r>
             <a:endParaRPr lang="en-US" sz="1600" dirty="0"/>
           </a:p>
@@ -1901,7 +1925,7 @@
                   <a:srgbClr val="2B2B2B"/>
                 </a:solidFill>
               </a:rPr>
-              <a:t>13 - 17 Nisan</a:t>
+              <a:t>19 – 30 Nisan</a:t>
             </a:r>
             <a:endParaRPr lang="en-US" sz="1600" dirty="0"/>
           </a:p>
@@ -1934,13 +1958,13 @@
             <a:r>
               <a:rPr lang="en-US" sz="2200" b="1" i="1" dirty="0">
                 <a:solidFill>
-                  <a:srgbClr val="1F4E79"/>
+                  <a:srgbClr val="2F3C7E"/>
                 </a:solidFill>
                 <a:latin typeface="Cambria" pitchFamily="34" charset="0"/>
                 <a:ea typeface="Cambria" pitchFamily="34" charset="-122"/>
                 <a:cs typeface="Cambria" pitchFamily="34" charset="-120"/>
               </a:rPr>
-              <a:t>"Duyarlılık, fark ettiğimizde harekete geçmektir."</a:t>
+              <a:t>"Merhamet, çaresize uzanan şefkatli bir eldir."</a:t>
             </a:r>
             <a:endParaRPr lang="en-US" sz="2200" dirty="0"/>
           </a:p>
@@ -1980,7 +2004,7 @@
                   <a:srgbClr val="2B2B2B"/>
                 </a:solidFill>
               </a:rPr>
-              <a:t>Çevremizdeki soruna kayıtsız kalmayız.</a:t>
+              <a:t>Zayıf ve çaresiz olana yardım ederiz.</a:t>
             </a:r>
             <a:endParaRPr lang="en-US" sz="1700" dirty="0"/>
           </a:p>
@@ -1998,7 +2022,7 @@
                   <a:srgbClr val="2B2B2B"/>
                 </a:solidFill>
               </a:rPr>
-              <a:t>Doğaya ve canlılara zarar vermemeye özen gösteririz.</a:t>
+              <a:t>Hayvanlara da şefkatle davranırız.</a:t>
             </a:r>
             <a:endParaRPr lang="en-US" sz="1700" dirty="0"/>
           </a:p>
@@ -2016,7 +2040,7 @@
                   <a:srgbClr val="2B2B2B"/>
                 </a:solidFill>
               </a:rPr>
-              <a:t>Yardıma ihtiyacı olanı fark ederiz.</a:t>
+              <a:t>Küçük bir iyilik bile büyük fark yaratır.</a:t>
             </a:r>
             <a:endParaRPr lang="en-US" sz="1700" dirty="0"/>
           </a:p>
@@ -2034,7 +2058,7 @@
                   <a:srgbClr val="2B2B2B"/>
                 </a:solidFill>
               </a:rPr>
-              <a:t>Küçük bir adım, büyük bir değişimin başlangıcıdır.</a:t>
+              <a:t>Merhamet, kalbi büyüten bir değerdir.</a:t>
             </a:r>
             <a:endParaRPr lang="en-US" sz="1700" dirty="0"/>
           </a:p>
@@ -2141,7 +2165,7 @@
                   <a:srgbClr val="F9E795"/>
                 </a:solidFill>
               </a:rPr>
-              <a:t>TASARRUF • DUYARLILIK</a:t>
+              <a:t>SORUMLULUK • MERHAMET</a:t>
             </a:r>
             <a:endParaRPr lang="en-US" sz="2200" dirty="0"/>
           </a:p>
